--- a/docs/Semantic News Novelty.pptx
+++ b/docs/Semantic News Novelty.pptx
@@ -5,7 +5,7 @@
     <p:sldMasterId id="2147483648" r:id="rId1"/>
   </p:sldMasterIdLst>
   <p:notesMasterIdLst>
-    <p:notesMasterId r:id="rId14"/>
+    <p:notesMasterId r:id="rId15"/>
   </p:notesMasterIdLst>
   <p:sldIdLst>
     <p:sldId id="256" r:id="rId2"/>
@@ -20,6 +20,7 @@
     <p:sldId id="265" r:id="rId11"/>
     <p:sldId id="266" r:id="rId12"/>
     <p:sldId id="267" r:id="rId13"/>
+    <p:sldId id="269" r:id="rId14"/>
   </p:sldIdLst>
   <p:sldSz cx="12192000" cy="6858000"/>
   <p:notesSz cx="6858000" cy="12192000"/>
@@ -764,6 +765,90 @@
               <a:t>12</a:t>
             </a:fld>
             <a:endParaRPr lang="en-US" dirty="0"/>
+          </a:p>
+        </p:txBody>
+      </p:sp>
+    </p:spTree>
+    <p:extLst>
+      <p:ext uri="{BB962C8B-B14F-4D97-AF65-F5344CB8AC3E}">
+        <p14:creationId xmlns:p14="http://schemas.microsoft.com/office/powerpoint/2010/main" val="1024086991"/>
+      </p:ext>
+    </p:extLst>
+  </p:cSld>
+  <p:clrMapOvr>
+    <a:masterClrMapping/>
+  </p:clrMapOvr>
+</p:notes>
+</file>
+
+<file path=ppt/notesSlides/notesSlide13.xml><?xml version="1.0" encoding="utf-8"?>
+<p:notes xmlns:a="http://schemas.openxmlformats.org/drawingml/2006/main" xmlns:r="http://schemas.openxmlformats.org/officeDocument/2006/relationships" xmlns:p="http://schemas.openxmlformats.org/presentationml/2006/main">
+  <p:cSld>
+    <p:spTree>
+      <p:nvGrpSpPr>
+        <p:cNvPr id="1" name=""/>
+        <p:cNvGrpSpPr/>
+        <p:nvPr/>
+      </p:nvGrpSpPr>
+      <p:grpSpPr>
+        <a:xfrm>
+          <a:off x="0" y="0"/>
+          <a:ext cx="0" cy="0"/>
+          <a:chOff x="0" y="0"/>
+          <a:chExt cx="0" cy="0"/>
+        </a:xfrm>
+      </p:grpSpPr>
+      <p:sp>
+        <p:nvSpPr>
+          <p:cNvPr id="2" name="Slide Image Placeholder 1"/>
+          <p:cNvSpPr>
+            <a:spLocks noGrp="1" noRot="1" noChangeAspect="1"/>
+          </p:cNvSpPr>
+          <p:nvPr>
+            <p:ph type="sldImg"/>
+          </p:nvPr>
+        </p:nvSpPr>
+        <p:spPr/>
+      </p:sp>
+      <p:sp>
+        <p:nvSpPr>
+          <p:cNvPr id="3" name="Notes Placeholder 2"/>
+          <p:cNvSpPr>
+            <a:spLocks noGrp="1"/>
+          </p:cNvSpPr>
+          <p:nvPr>
+            <p:ph type="body" idx="1"/>
+          </p:nvPr>
+        </p:nvSpPr>
+        <p:spPr/>
+        <p:txBody>
+          <a:bodyPr/>
+          <a:lstStyle/>
+          <a:p>
+            <a:endParaRPr lang="en-US" dirty="0"/>
+          </a:p>
+        </p:txBody>
+      </p:sp>
+      <p:sp>
+        <p:nvSpPr>
+          <p:cNvPr id="4" name="Slide Number Placeholder 3"/>
+          <p:cNvSpPr>
+            <a:spLocks noGrp="1"/>
+          </p:cNvSpPr>
+          <p:nvPr>
+            <p:ph type="sldNum" sz="quarter" idx="10"/>
+          </p:nvPr>
+        </p:nvSpPr>
+        <p:spPr/>
+        <p:txBody>
+          <a:bodyPr/>
+          <a:lstStyle/>
+          <a:p>
+            <a:fld id="{F7021451-1387-4CA6-816F-3879F97B5CBC}" type="slidenum">
+              <a:rPr lang="en-US"/>
+              <a:t>13</a:t>
+            </a:fld>
+            <a:endParaRPr lang="en-US"/>
           </a:p>
         </p:txBody>
       </p:sp>
@@ -4651,6 +4736,935 @@
               <a:buNone/>
             </a:pPr>
             <a:endParaRPr lang="ru-RU" sz="1350" noProof="0" dirty="0"/>
+          </a:p>
+        </p:txBody>
+      </p:sp>
+    </p:spTree>
+  </p:cSld>
+  <p:clrMapOvr>
+    <a:masterClrMapping/>
+  </p:clrMapOvr>
+</p:sld>
+</file>
+
+<file path=ppt/slides/slide13.xml><?xml version="1.0" encoding="utf-8"?>
+<p:sld xmlns:a="http://schemas.openxmlformats.org/drawingml/2006/main" xmlns:r="http://schemas.openxmlformats.org/officeDocument/2006/relationships" xmlns:p="http://schemas.openxmlformats.org/presentationml/2006/main">
+  <p:cSld>
+    <p:spTree>
+      <p:nvGrpSpPr>
+        <p:cNvPr id="1" name=""/>
+        <p:cNvGrpSpPr/>
+        <p:nvPr/>
+      </p:nvGrpSpPr>
+      <p:grpSpPr>
+        <a:xfrm>
+          <a:off x="0" y="0"/>
+          <a:ext cx="0" cy="0"/>
+          <a:chOff x="0" y="0"/>
+          <a:chExt cx="0" cy="0"/>
+        </a:xfrm>
+      </p:grpSpPr>
+      <p:sp>
+        <p:nvSpPr>
+          <p:cNvPr id="3" name="Text 1"/>
+          <p:cNvSpPr/>
+          <p:nvPr/>
+        </p:nvSpPr>
+        <p:spPr>
+          <a:xfrm>
+            <a:off x="11475720" y="283464"/>
+            <a:ext cx="329184" cy="228600"/>
+          </a:xfrm>
+          <a:prstGeom prst="rect">
+            <a:avLst/>
+          </a:prstGeom>
+          <a:noFill/>
+          <a:ln/>
+        </p:spPr>
+        <p:txBody>
+          <a:bodyPr wrap="square" lIns="0" tIns="0" rIns="0" bIns="0" rtlCol="0" anchor="ctr"/>
+          <a:lstStyle/>
+          <a:p>
+            <a:pPr marL="0" indent="0" algn="r">
+              <a:buNone/>
+            </a:pPr>
+            <a:r>
+              <a:rPr lang="en-US" sz="1400" b="1" dirty="0">
+                <a:solidFill>
+                  <a:srgbClr val="0B4FC3"/>
+                </a:solidFill>
+                <a:latin typeface="Aptos" pitchFamily="34" charset="0"/>
+                <a:ea typeface="Aptos" pitchFamily="34" charset="-122"/>
+                <a:cs typeface="Aptos" pitchFamily="34" charset="-120"/>
+              </a:rPr>
+              <a:t>17</a:t>
+            </a:r>
+            <a:endParaRPr lang="en-US" sz="1400" dirty="0"/>
+          </a:p>
+        </p:txBody>
+      </p:sp>
+      <p:sp>
+        <p:nvSpPr>
+          <p:cNvPr id="5" name="Text 3"/>
+          <p:cNvSpPr/>
+          <p:nvPr/>
+        </p:nvSpPr>
+        <p:spPr>
+          <a:xfrm>
+            <a:off x="2423160" y="1252728"/>
+            <a:ext cx="7315200" cy="786384"/>
+          </a:xfrm>
+          <a:prstGeom prst="rect">
+            <a:avLst/>
+          </a:prstGeom>
+          <a:noFill/>
+          <a:ln/>
+        </p:spPr>
+        <p:txBody>
+          <a:bodyPr wrap="square" lIns="0" tIns="0" rIns="0" bIns="0" rtlCol="0" anchor="ctr"/>
+          <a:lstStyle/>
+          <a:p>
+            <a:pPr marL="0" indent="0" algn="ctr">
+              <a:buNone/>
+            </a:pPr>
+            <a:r>
+              <a:rPr lang="en-US" sz="6200" b="1" dirty="0">
+                <a:solidFill>
+                  <a:srgbClr val="061A40"/>
+                </a:solidFill>
+                <a:latin typeface="Aptos Display" pitchFamily="34" charset="0"/>
+                <a:ea typeface="Aptos Display" pitchFamily="34" charset="-122"/>
+                <a:cs typeface="Aptos Display" pitchFamily="34" charset="-120"/>
+              </a:rPr>
+              <a:t>Вопросы?</a:t>
+            </a:r>
+            <a:endParaRPr lang="en-US" sz="6200" dirty="0"/>
+          </a:p>
+        </p:txBody>
+      </p:sp>
+      <p:sp>
+        <p:nvSpPr>
+          <p:cNvPr id="6" name="Shape 4"/>
+          <p:cNvSpPr/>
+          <p:nvPr/>
+        </p:nvSpPr>
+        <p:spPr>
+          <a:xfrm>
+            <a:off x="5449824" y="2331720"/>
+            <a:ext cx="1051560" cy="0"/>
+          </a:xfrm>
+          <a:prstGeom prst="line">
+            <a:avLst/>
+          </a:prstGeom>
+          <a:noFill/>
+          <a:ln w="50800">
+            <a:solidFill>
+              <a:srgbClr val="0B4FC3"/>
+            </a:solidFill>
+            <a:prstDash val="solid"/>
+            <a:headEnd type="none"/>
+            <a:tailEnd type="none"/>
+          </a:ln>
+        </p:spPr>
+      </p:sp>
+      <p:sp>
+        <p:nvSpPr>
+          <p:cNvPr id="7" name="Text 5"/>
+          <p:cNvSpPr/>
+          <p:nvPr/>
+        </p:nvSpPr>
+        <p:spPr>
+          <a:xfrm>
+            <a:off x="3108960" y="2743200"/>
+            <a:ext cx="5989320" cy="384048"/>
+          </a:xfrm>
+          <a:prstGeom prst="rect">
+            <a:avLst/>
+          </a:prstGeom>
+          <a:noFill/>
+          <a:ln/>
+        </p:spPr>
+        <p:txBody>
+          <a:bodyPr wrap="square" lIns="0" tIns="0" rIns="0" bIns="0" rtlCol="0" anchor="ctr"/>
+          <a:lstStyle/>
+          <a:p>
+            <a:pPr marL="0" indent="0" algn="ctr">
+              <a:buNone/>
+            </a:pPr>
+            <a:r>
+              <a:rPr lang="en-US" sz="2900" b="1" dirty="0">
+                <a:solidFill>
+                  <a:srgbClr val="0B4FC3"/>
+                </a:solidFill>
+                <a:latin typeface="Aptos Display" pitchFamily="34" charset="0"/>
+                <a:ea typeface="Aptos Display" pitchFamily="34" charset="-122"/>
+                <a:cs typeface="Aptos Display" pitchFamily="34" charset="-120"/>
+              </a:rPr>
+              <a:t>Semantic News Novelty</a:t>
+            </a:r>
+            <a:endParaRPr lang="en-US" sz="2900" dirty="0"/>
+          </a:p>
+        </p:txBody>
+      </p:sp>
+      <p:sp>
+        <p:nvSpPr>
+          <p:cNvPr id="8" name="Text 6"/>
+          <p:cNvSpPr/>
+          <p:nvPr/>
+        </p:nvSpPr>
+        <p:spPr>
+          <a:xfrm>
+            <a:off x="1645920" y="3273552"/>
+            <a:ext cx="9006840" cy="310896"/>
+          </a:xfrm>
+          <a:prstGeom prst="rect">
+            <a:avLst/>
+          </a:prstGeom>
+          <a:noFill/>
+          <a:ln/>
+        </p:spPr>
+        <p:txBody>
+          <a:bodyPr wrap="square" lIns="0" tIns="0" rIns="0" bIns="0" rtlCol="0" anchor="ctr"/>
+          <a:lstStyle/>
+          <a:p>
+            <a:pPr marL="0" indent="0" algn="ctr">
+              <a:buNone/>
+            </a:pPr>
+            <a:r>
+              <a:rPr lang="en-US" sz="1800" dirty="0">
+                <a:solidFill>
+                  <a:srgbClr val="061A40"/>
+                </a:solidFill>
+                <a:latin typeface="Aptos" pitchFamily="34" charset="0"/>
+                <a:ea typeface="Aptos" pitchFamily="34" charset="-122"/>
+                <a:cs typeface="Aptos" pitchFamily="34" charset="-120"/>
+              </a:rPr>
+              <a:t>ML-сервис для группировки новостей и определения значимых обновлений</a:t>
+            </a:r>
+            <a:endParaRPr lang="en-US" sz="1800" dirty="0"/>
+          </a:p>
+        </p:txBody>
+      </p:sp>
+      <p:sp>
+        <p:nvSpPr>
+          <p:cNvPr id="9" name="Shape 7"/>
+          <p:cNvSpPr/>
+          <p:nvPr/>
+        </p:nvSpPr>
+        <p:spPr>
+          <a:xfrm>
+            <a:off x="658368" y="3986784"/>
+            <a:ext cx="10881360" cy="1600200"/>
+          </a:xfrm>
+          <a:prstGeom prst="roundRect">
+            <a:avLst>
+              <a:gd name="adj" fmla="val 6857"/>
+            </a:avLst>
+          </a:prstGeom>
+          <a:solidFill>
+            <a:srgbClr val="F3F7FF">
+              <a:alpha val="92000"/>
+            </a:srgbClr>
+          </a:solidFill>
+          <a:ln w="12700">
+            <a:solidFill>
+              <a:srgbClr val="B7CBEE"/>
+            </a:solidFill>
+            <a:prstDash val="solid"/>
+          </a:ln>
+        </p:spPr>
+      </p:sp>
+      <p:sp>
+        <p:nvSpPr>
+          <p:cNvPr id="10" name="Text 8"/>
+          <p:cNvSpPr/>
+          <p:nvPr/>
+        </p:nvSpPr>
+        <p:spPr>
+          <a:xfrm>
+            <a:off x="960120" y="4233672"/>
+            <a:ext cx="731520" cy="201168"/>
+          </a:xfrm>
+          <a:prstGeom prst="rect">
+            <a:avLst/>
+          </a:prstGeom>
+          <a:noFill/>
+          <a:ln/>
+        </p:spPr>
+        <p:txBody>
+          <a:bodyPr wrap="square" lIns="0" tIns="0" rIns="0" bIns="0" rtlCol="0" anchor="ctr"/>
+          <a:lstStyle/>
+          <a:p>
+            <a:pPr marL="0" indent="0">
+              <a:buNone/>
+            </a:pPr>
+            <a:r>
+              <a:rPr lang="en-US" sz="1500" b="1" dirty="0">
+                <a:solidFill>
+                  <a:srgbClr val="0B4FC3"/>
+                </a:solidFill>
+                <a:latin typeface="Aptos" pitchFamily="34" charset="0"/>
+                <a:ea typeface="Aptos" pitchFamily="34" charset="-122"/>
+                <a:cs typeface="Aptos" pitchFamily="34" charset="-120"/>
+              </a:rPr>
+              <a:t>Итог:</a:t>
+            </a:r>
+            <a:endParaRPr lang="en-US" sz="1500" dirty="0"/>
+          </a:p>
+        </p:txBody>
+      </p:sp>
+      <p:sp>
+        <p:nvSpPr>
+          <p:cNvPr id="11" name="Text 9"/>
+          <p:cNvSpPr/>
+          <p:nvPr/>
+        </p:nvSpPr>
+        <p:spPr>
+          <a:xfrm>
+            <a:off x="960120" y="4572000"/>
+            <a:ext cx="713232" cy="502920"/>
+          </a:xfrm>
+          <a:prstGeom prst="rect">
+            <a:avLst/>
+          </a:prstGeom>
+          <a:noFill/>
+          <a:ln/>
+        </p:spPr>
+        <p:txBody>
+          <a:bodyPr wrap="square" lIns="0" tIns="0" rIns="0" bIns="0" rtlCol="0" anchor="ctr"/>
+          <a:lstStyle/>
+          <a:p>
+            <a:pPr marL="0" indent="0" algn="ctr">
+              <a:buNone/>
+            </a:pPr>
+            <a:r>
+              <a:rPr lang="en-US" sz="3400" dirty="0">
+                <a:solidFill>
+                  <a:srgbClr val="0B4FC3"/>
+                </a:solidFill>
+                <a:latin typeface="Segoe UI Symbol" pitchFamily="34" charset="0"/>
+                <a:ea typeface="Segoe UI Symbol" pitchFamily="34" charset="-122"/>
+                <a:cs typeface="Segoe UI Symbol" pitchFamily="34" charset="-120"/>
+              </a:rPr>
+              <a:t>◎</a:t>
+            </a:r>
+            <a:endParaRPr lang="en-US" sz="3400" dirty="0"/>
+          </a:p>
+        </p:txBody>
+      </p:sp>
+      <p:sp>
+        <p:nvSpPr>
+          <p:cNvPr id="12" name="Text 10"/>
+          <p:cNvSpPr/>
+          <p:nvPr/>
+        </p:nvSpPr>
+        <p:spPr>
+          <a:xfrm>
+            <a:off x="1828800" y="4507992"/>
+            <a:ext cx="2148840" cy="246888"/>
+          </a:xfrm>
+          <a:prstGeom prst="rect">
+            <a:avLst/>
+          </a:prstGeom>
+          <a:noFill/>
+          <a:ln/>
+        </p:spPr>
+        <p:txBody>
+          <a:bodyPr wrap="square" lIns="0" tIns="0" rIns="0" bIns="0" rtlCol="0" anchor="ctr"/>
+          <a:lstStyle/>
+          <a:p>
+            <a:pPr marL="0" indent="0">
+              <a:buNone/>
+            </a:pPr>
+            <a:r>
+              <a:rPr lang="en-US" sz="1500" b="1" dirty="0">
+                <a:solidFill>
+                  <a:srgbClr val="061A40"/>
+                </a:solidFill>
+                <a:latin typeface="Aptos" pitchFamily="34" charset="0"/>
+                <a:ea typeface="Aptos" pitchFamily="34" charset="-122"/>
+                <a:cs typeface="Aptos" pitchFamily="34" charset="-120"/>
+              </a:rPr>
+              <a:t>Группировка новостей</a:t>
+            </a:r>
+            <a:endParaRPr lang="en-US" sz="1500" dirty="0"/>
+          </a:p>
+        </p:txBody>
+      </p:sp>
+      <p:sp>
+        <p:nvSpPr>
+          <p:cNvPr id="13" name="Text 11"/>
+          <p:cNvSpPr/>
+          <p:nvPr/>
+        </p:nvSpPr>
+        <p:spPr>
+          <a:xfrm>
+            <a:off x="1828800" y="4828032"/>
+            <a:ext cx="2267712" cy="502920"/>
+          </a:xfrm>
+          <a:prstGeom prst="rect">
+            <a:avLst/>
+          </a:prstGeom>
+          <a:noFill/>
+          <a:ln/>
+        </p:spPr>
+        <p:txBody>
+          <a:bodyPr wrap="square" lIns="127" tIns="127" rIns="127" bIns="127" rtlCol="0" anchor="t">
+            <a:normAutofit fontScale="92500"/>
+          </a:bodyPr>
+          <a:lstStyle/>
+          <a:p>
+            <a:pPr marL="0" indent="0">
+              <a:buNone/>
+            </a:pPr>
+            <a:r>
+              <a:rPr lang="en-US" sz="1350" dirty="0">
+                <a:solidFill>
+                  <a:srgbClr val="061A40"/>
+                </a:solidFill>
+                <a:latin typeface="Aptos" pitchFamily="34" charset="0"/>
+                <a:ea typeface="Aptos" pitchFamily="34" charset="-122"/>
+                <a:cs typeface="Aptos" pitchFamily="34" charset="-120"/>
+              </a:rPr>
+              <a:t>Объединяем похожие публикации в сюжеты по смыслу</a:t>
+            </a:r>
+            <a:endParaRPr lang="en-US" sz="1350" dirty="0"/>
+          </a:p>
+        </p:txBody>
+      </p:sp>
+      <p:sp>
+        <p:nvSpPr>
+          <p:cNvPr id="14" name="Shape 12"/>
+          <p:cNvSpPr/>
+          <p:nvPr/>
+        </p:nvSpPr>
+        <p:spPr>
+          <a:xfrm>
+            <a:off x="4224528" y="4343400"/>
+            <a:ext cx="0" cy="1060704"/>
+          </a:xfrm>
+          <a:prstGeom prst="line">
+            <a:avLst/>
+          </a:prstGeom>
+          <a:noFill/>
+          <a:ln w="12700">
+            <a:solidFill>
+              <a:srgbClr val="D8E6FF"/>
+            </a:solidFill>
+            <a:prstDash val="solid"/>
+          </a:ln>
+        </p:spPr>
+      </p:sp>
+      <p:sp>
+        <p:nvSpPr>
+          <p:cNvPr id="15" name="Text 13"/>
+          <p:cNvSpPr/>
+          <p:nvPr/>
+        </p:nvSpPr>
+        <p:spPr>
+          <a:xfrm>
+            <a:off x="4526280" y="4572000"/>
+            <a:ext cx="713232" cy="502920"/>
+          </a:xfrm>
+          <a:prstGeom prst="rect">
+            <a:avLst/>
+          </a:prstGeom>
+          <a:noFill/>
+          <a:ln/>
+        </p:spPr>
+        <p:txBody>
+          <a:bodyPr wrap="square" lIns="0" tIns="0" rIns="0" bIns="0" rtlCol="0" anchor="ctr"/>
+          <a:lstStyle/>
+          <a:p>
+            <a:pPr marL="0" indent="0" algn="ctr">
+              <a:buNone/>
+            </a:pPr>
+            <a:r>
+              <a:rPr lang="en-US" sz="3400" dirty="0">
+                <a:solidFill>
+                  <a:srgbClr val="0B4FC3"/>
+                </a:solidFill>
+                <a:latin typeface="Segoe UI Symbol" pitchFamily="34" charset="0"/>
+                <a:ea typeface="Segoe UI Symbol" pitchFamily="34" charset="-122"/>
+                <a:cs typeface="Segoe UI Symbol" pitchFamily="34" charset="-120"/>
+              </a:rPr>
+              <a:t>⌾</a:t>
+            </a:r>
+            <a:endParaRPr lang="en-US" sz="3400" dirty="0"/>
+          </a:p>
+        </p:txBody>
+      </p:sp>
+      <p:sp>
+        <p:nvSpPr>
+          <p:cNvPr id="16" name="Text 14"/>
+          <p:cNvSpPr/>
+          <p:nvPr/>
+        </p:nvSpPr>
+        <p:spPr>
+          <a:xfrm>
+            <a:off x="5394960" y="4507992"/>
+            <a:ext cx="2148840" cy="246888"/>
+          </a:xfrm>
+          <a:prstGeom prst="rect">
+            <a:avLst/>
+          </a:prstGeom>
+          <a:noFill/>
+          <a:ln/>
+        </p:spPr>
+        <p:txBody>
+          <a:bodyPr wrap="square" lIns="0" tIns="0" rIns="0" bIns="0" rtlCol="0" anchor="ctr"/>
+          <a:lstStyle/>
+          <a:p>
+            <a:pPr marL="0" indent="0">
+              <a:buNone/>
+            </a:pPr>
+            <a:r>
+              <a:rPr lang="en-US" sz="1500" b="1" dirty="0">
+                <a:solidFill>
+                  <a:srgbClr val="061A40"/>
+                </a:solidFill>
+                <a:latin typeface="Aptos" pitchFamily="34" charset="0"/>
+                <a:ea typeface="Aptos" pitchFamily="34" charset="-122"/>
+                <a:cs typeface="Aptos" pitchFamily="34" charset="-120"/>
+              </a:rPr>
+              <a:t>Определение новизны</a:t>
+            </a:r>
+            <a:endParaRPr lang="en-US" sz="1500" dirty="0"/>
+          </a:p>
+        </p:txBody>
+      </p:sp>
+      <p:sp>
+        <p:nvSpPr>
+          <p:cNvPr id="17" name="Text 15"/>
+          <p:cNvSpPr/>
+          <p:nvPr/>
+        </p:nvSpPr>
+        <p:spPr>
+          <a:xfrm>
+            <a:off x="5394960" y="4828032"/>
+            <a:ext cx="2267712" cy="502920"/>
+          </a:xfrm>
+          <a:prstGeom prst="rect">
+            <a:avLst/>
+          </a:prstGeom>
+          <a:noFill/>
+          <a:ln/>
+        </p:spPr>
+        <p:txBody>
+          <a:bodyPr wrap="square" lIns="127" tIns="127" rIns="127" bIns="127" rtlCol="0" anchor="t">
+            <a:normAutofit fontScale="92500" lnSpcReduction="10000"/>
+          </a:bodyPr>
+          <a:lstStyle/>
+          <a:p>
+            <a:pPr marL="0" indent="0">
+              <a:buNone/>
+            </a:pPr>
+            <a:r>
+              <a:rPr lang="en-US" sz="1350" dirty="0">
+                <a:solidFill>
+                  <a:srgbClr val="061A40"/>
+                </a:solidFill>
+                <a:latin typeface="Aptos" pitchFamily="34" charset="0"/>
+                <a:ea typeface="Aptos" pitchFamily="34" charset="-122"/>
+                <a:cs typeface="Aptos" pitchFamily="34" charset="-120"/>
+              </a:rPr>
+              <a:t>Выделяем значимые обновления внутри сюжета, фильтруем повторы</a:t>
+            </a:r>
+            <a:endParaRPr lang="en-US" sz="1350" dirty="0"/>
+          </a:p>
+        </p:txBody>
+      </p:sp>
+      <p:sp>
+        <p:nvSpPr>
+          <p:cNvPr id="18" name="Shape 16"/>
+          <p:cNvSpPr/>
+          <p:nvPr/>
+        </p:nvSpPr>
+        <p:spPr>
+          <a:xfrm>
+            <a:off x="7708392" y="4343400"/>
+            <a:ext cx="0" cy="1060704"/>
+          </a:xfrm>
+          <a:prstGeom prst="line">
+            <a:avLst/>
+          </a:prstGeom>
+          <a:noFill/>
+          <a:ln w="12700">
+            <a:solidFill>
+              <a:srgbClr val="D8E6FF"/>
+            </a:solidFill>
+            <a:prstDash val="solid"/>
+          </a:ln>
+        </p:spPr>
+      </p:sp>
+      <p:sp>
+        <p:nvSpPr>
+          <p:cNvPr id="19" name="Text 17"/>
+          <p:cNvSpPr/>
+          <p:nvPr/>
+        </p:nvSpPr>
+        <p:spPr>
+          <a:xfrm>
+            <a:off x="7973568" y="4572000"/>
+            <a:ext cx="713232" cy="502920"/>
+          </a:xfrm>
+          <a:prstGeom prst="rect">
+            <a:avLst/>
+          </a:prstGeom>
+          <a:noFill/>
+          <a:ln/>
+        </p:spPr>
+        <p:txBody>
+          <a:bodyPr wrap="square" lIns="0" tIns="0" rIns="0" bIns="0" rtlCol="0" anchor="ctr"/>
+          <a:lstStyle/>
+          <a:p>
+            <a:pPr marL="0" indent="0" algn="ctr">
+              <a:buNone/>
+            </a:pPr>
+            <a:r>
+              <a:rPr lang="en-US" sz="3400" dirty="0">
+                <a:solidFill>
+                  <a:srgbClr val="0B4FC3"/>
+                </a:solidFill>
+                <a:latin typeface="Segoe UI Symbol" pitchFamily="34" charset="0"/>
+                <a:ea typeface="Segoe UI Symbol" pitchFamily="34" charset="-122"/>
+                <a:cs typeface="Segoe UI Symbol" pitchFamily="34" charset="-120"/>
+              </a:rPr>
+              <a:t>⚙</a:t>
+            </a:r>
+            <a:endParaRPr lang="en-US" sz="3400" dirty="0"/>
+          </a:p>
+        </p:txBody>
+      </p:sp>
+      <p:sp>
+        <p:nvSpPr>
+          <p:cNvPr id="20" name="Text 18"/>
+          <p:cNvSpPr/>
+          <p:nvPr/>
+        </p:nvSpPr>
+        <p:spPr>
+          <a:xfrm>
+            <a:off x="8842248" y="4507992"/>
+            <a:ext cx="2148840" cy="246888"/>
+          </a:xfrm>
+          <a:prstGeom prst="rect">
+            <a:avLst/>
+          </a:prstGeom>
+          <a:noFill/>
+          <a:ln/>
+        </p:spPr>
+        <p:txBody>
+          <a:bodyPr wrap="square" lIns="0" tIns="0" rIns="0" bIns="0" rtlCol="0" anchor="ctr"/>
+          <a:lstStyle/>
+          <a:p>
+            <a:pPr marL="0" indent="0">
+              <a:buNone/>
+            </a:pPr>
+            <a:r>
+              <a:rPr lang="en-US" sz="1500" b="1" dirty="0">
+                <a:solidFill>
+                  <a:srgbClr val="061A40"/>
+                </a:solidFill>
+                <a:latin typeface="Aptos" pitchFamily="34" charset="0"/>
+                <a:ea typeface="Aptos" pitchFamily="34" charset="-122"/>
+                <a:cs typeface="Aptos" pitchFamily="34" charset="-120"/>
+              </a:rPr>
+              <a:t>Готовый ML-сервис</a:t>
+            </a:r>
+            <a:endParaRPr lang="en-US" sz="1500" dirty="0"/>
+          </a:p>
+        </p:txBody>
+      </p:sp>
+      <p:sp>
+        <p:nvSpPr>
+          <p:cNvPr id="21" name="Text 19"/>
+          <p:cNvSpPr/>
+          <p:nvPr/>
+        </p:nvSpPr>
+        <p:spPr>
+          <a:xfrm>
+            <a:off x="8842248" y="4828032"/>
+            <a:ext cx="2267712" cy="502920"/>
+          </a:xfrm>
+          <a:prstGeom prst="rect">
+            <a:avLst/>
+          </a:prstGeom>
+          <a:noFill/>
+          <a:ln/>
+        </p:spPr>
+        <p:txBody>
+          <a:bodyPr wrap="square" lIns="127" tIns="127" rIns="127" bIns="127" rtlCol="0" anchor="t">
+            <a:normAutofit fontScale="92500" lnSpcReduction="10000"/>
+          </a:bodyPr>
+          <a:lstStyle/>
+          <a:p>
+            <a:pPr marL="0" indent="0">
+              <a:buNone/>
+            </a:pPr>
+            <a:r>
+              <a:rPr lang="en-US" sz="1350" dirty="0">
+                <a:solidFill>
+                  <a:srgbClr val="061A40"/>
+                </a:solidFill>
+                <a:latin typeface="Aptos" pitchFamily="34" charset="0"/>
+                <a:ea typeface="Aptos" pitchFamily="34" charset="-122"/>
+                <a:cs typeface="Aptos" pitchFamily="34" charset="-120"/>
+              </a:rPr>
+              <a:t>API, веб-интерфейс, Docker-инфраструктура, мониторинг и метрики</a:t>
+            </a:r>
+            <a:endParaRPr lang="en-US" sz="1350" dirty="0"/>
+          </a:p>
+        </p:txBody>
+      </p:sp>
+      <p:sp>
+        <p:nvSpPr>
+          <p:cNvPr id="22" name="Text 20"/>
+          <p:cNvSpPr/>
+          <p:nvPr/>
+        </p:nvSpPr>
+        <p:spPr>
+          <a:xfrm>
+            <a:off x="3749040" y="5897880"/>
+            <a:ext cx="4663440" cy="274320"/>
+          </a:xfrm>
+          <a:prstGeom prst="rect">
+            <a:avLst/>
+          </a:prstGeom>
+          <a:noFill/>
+          <a:ln/>
+        </p:spPr>
+        <p:txBody>
+          <a:bodyPr wrap="square" lIns="0" tIns="0" rIns="0" bIns="0" rtlCol="0" anchor="ctr"/>
+          <a:lstStyle/>
+          <a:p>
+            <a:pPr marL="0" indent="0" algn="ctr">
+              <a:buNone/>
+            </a:pPr>
+            <a:r>
+              <a:rPr lang="en-US" sz="1800" b="1" dirty="0">
+                <a:solidFill>
+                  <a:srgbClr val="0B4FC3"/>
+                </a:solidFill>
+                <a:latin typeface="Aptos" pitchFamily="34" charset="0"/>
+                <a:ea typeface="Aptos" pitchFamily="34" charset="-122"/>
+                <a:cs typeface="Aptos" pitchFamily="34" charset="-120"/>
+              </a:rPr>
+              <a:t>Спасибо за внимание!</a:t>
+            </a:r>
+            <a:endParaRPr lang="en-US" sz="1800" dirty="0"/>
+          </a:p>
+        </p:txBody>
+      </p:sp>
+      <p:sp>
+        <p:nvSpPr>
+          <p:cNvPr id="23" name="Text 21"/>
+          <p:cNvSpPr/>
+          <p:nvPr/>
+        </p:nvSpPr>
+        <p:spPr>
+          <a:xfrm>
+            <a:off x="3749040" y="6236208"/>
+            <a:ext cx="4663440" cy="256032"/>
+          </a:xfrm>
+          <a:prstGeom prst="rect">
+            <a:avLst/>
+          </a:prstGeom>
+          <a:noFill/>
+          <a:ln/>
+        </p:spPr>
+        <p:txBody>
+          <a:bodyPr wrap="square" lIns="0" tIns="0" rIns="0" bIns="0" rtlCol="0" anchor="ctr"/>
+          <a:lstStyle/>
+          <a:p>
+            <a:pPr marL="0" indent="0" algn="ctr">
+              <a:buNone/>
+            </a:pPr>
+            <a:r>
+              <a:rPr lang="en-US" sz="1700" dirty="0">
+                <a:solidFill>
+                  <a:srgbClr val="061A40"/>
+                </a:solidFill>
+                <a:latin typeface="Aptos" pitchFamily="34" charset="0"/>
+                <a:ea typeface="Aptos" pitchFamily="34" charset="-122"/>
+                <a:cs typeface="Aptos" pitchFamily="34" charset="-120"/>
+              </a:rPr>
+              <a:t>Готов ответить на вопросы</a:t>
+            </a:r>
+            <a:endParaRPr lang="en-US" sz="1700" dirty="0"/>
+          </a:p>
+        </p:txBody>
+      </p:sp>
+      <p:sp>
+        <p:nvSpPr>
+          <p:cNvPr id="24" name="Shape 22"/>
+          <p:cNvSpPr/>
+          <p:nvPr/>
+        </p:nvSpPr>
+        <p:spPr>
+          <a:xfrm>
+            <a:off x="402336" y="6620256"/>
+            <a:ext cx="11155680" cy="0"/>
+          </a:xfrm>
+          <a:prstGeom prst="line">
+            <a:avLst/>
+          </a:prstGeom>
+          <a:noFill/>
+          <a:ln w="12700">
+            <a:solidFill>
+              <a:srgbClr val="B7CBEE"/>
+            </a:solidFill>
+            <a:prstDash val="solid"/>
+          </a:ln>
+        </p:spPr>
+      </p:sp>
+      <p:sp>
+        <p:nvSpPr>
+          <p:cNvPr id="26" name="Text 24"/>
+          <p:cNvSpPr/>
+          <p:nvPr/>
+        </p:nvSpPr>
+        <p:spPr>
+          <a:xfrm>
+            <a:off x="5230368" y="6684264"/>
+            <a:ext cx="1645920" cy="164592"/>
+          </a:xfrm>
+          <a:prstGeom prst="rect">
+            <a:avLst/>
+          </a:prstGeom>
+          <a:noFill/>
+          <a:ln/>
+        </p:spPr>
+        <p:txBody>
+          <a:bodyPr wrap="square" lIns="0" tIns="0" rIns="0" bIns="0" rtlCol="0" anchor="ctr"/>
+          <a:lstStyle/>
+          <a:p>
+            <a:pPr marL="0" indent="0" algn="ctr">
+              <a:buNone/>
+            </a:pPr>
+            <a:r>
+              <a:rPr lang="ru-RU" sz="1050" dirty="0">
+                <a:solidFill>
+                  <a:srgbClr val="0B4FC3"/>
+                </a:solidFill>
+              </a:rPr>
+              <a:t>Константин Лебедев</a:t>
+            </a:r>
+            <a:endParaRPr lang="en-US" sz="1050" dirty="0"/>
+          </a:p>
+        </p:txBody>
+      </p:sp>
+      <p:sp>
+        <p:nvSpPr>
+          <p:cNvPr id="27" name="Text 25"/>
+          <p:cNvSpPr/>
+          <p:nvPr/>
+        </p:nvSpPr>
+        <p:spPr>
+          <a:xfrm>
+            <a:off x="11192256" y="6684264"/>
+            <a:ext cx="384048" cy="164592"/>
+          </a:xfrm>
+          <a:prstGeom prst="rect">
+            <a:avLst/>
+          </a:prstGeom>
+          <a:noFill/>
+          <a:ln/>
+        </p:spPr>
+        <p:txBody>
+          <a:bodyPr wrap="square" lIns="0" tIns="0" rIns="0" bIns="0" rtlCol="0" anchor="ctr"/>
+          <a:lstStyle/>
+          <a:p>
+            <a:pPr marL="0" indent="0" algn="r">
+              <a:buNone/>
+            </a:pPr>
+            <a:r>
+              <a:rPr lang="en-US" sz="1050" dirty="0">
+                <a:solidFill>
+                  <a:srgbClr val="0B4FC3"/>
+                </a:solidFill>
+              </a:rPr>
+              <a:t>2026</a:t>
+            </a:r>
+            <a:endParaRPr lang="en-US" sz="1050" dirty="0"/>
+          </a:p>
+        </p:txBody>
+      </p:sp>
+      <p:sp>
+        <p:nvSpPr>
+          <p:cNvPr id="28" name="Text 1">
+            <a:extLst>
+              <a:ext uri="{FF2B5EF4-FFF2-40B4-BE49-F238E27FC236}">
+                <a16:creationId xmlns:a16="http://schemas.microsoft.com/office/drawing/2014/main" id="{0E5A2FCC-1E1F-7BD9-99A0-B7464146502F}"/>
+              </a:ext>
+            </a:extLst>
+          </p:cNvPr>
+          <p:cNvSpPr/>
+          <p:nvPr/>
+        </p:nvSpPr>
+        <p:spPr>
+          <a:xfrm>
+            <a:off x="518160" y="322638"/>
+            <a:ext cx="8595360" cy="502920"/>
+          </a:xfrm>
+          <a:prstGeom prst="rect">
+            <a:avLst/>
+          </a:prstGeom>
+          <a:noFill/>
+          <a:ln/>
+        </p:spPr>
+        <p:txBody>
+          <a:bodyPr wrap="square" lIns="0" tIns="0" rIns="0" bIns="0" rtlCol="0" anchor="ctr"/>
+          <a:lstStyle/>
+          <a:p>
+            <a:pPr marL="0" indent="0">
+              <a:buNone/>
+            </a:pPr>
+            <a:r>
+              <a:rPr lang="en-US" sz="2900" b="1" dirty="0">
+                <a:solidFill>
+                  <a:srgbClr val="111827"/>
+                </a:solidFill>
+                <a:latin typeface="Aptos Display" pitchFamily="34" charset="0"/>
+              </a:rPr>
+              <a:t>Semantic News Novelty</a:t>
+            </a:r>
+            <a:endParaRPr lang="ru-RU" sz="2900" noProof="0" dirty="0"/>
+          </a:p>
+        </p:txBody>
+      </p:sp>
+      <p:sp>
+        <p:nvSpPr>
+          <p:cNvPr id="29" name="Shape 3">
+            <a:extLst>
+              <a:ext uri="{FF2B5EF4-FFF2-40B4-BE49-F238E27FC236}">
+                <a16:creationId xmlns:a16="http://schemas.microsoft.com/office/drawing/2014/main" id="{0D3DB228-C5C4-24AD-7750-54CE03D24B79}"/>
+              </a:ext>
+            </a:extLst>
+          </p:cNvPr>
+          <p:cNvSpPr/>
+          <p:nvPr/>
+        </p:nvSpPr>
+        <p:spPr>
+          <a:xfrm>
+            <a:off x="518160" y="1173030"/>
+            <a:ext cx="11155680" cy="0"/>
+          </a:xfrm>
+          <a:prstGeom prst="line">
+            <a:avLst/>
+          </a:prstGeom>
+          <a:noFill/>
+          <a:ln w="10160">
+            <a:solidFill>
+              <a:srgbClr val="CBD5E1"/>
+            </a:solidFill>
+            <a:prstDash val="solid"/>
+          </a:ln>
+        </p:spPr>
+        <p:txBody>
+          <a:bodyPr/>
+          <a:lstStyle/>
+          <a:p>
+            <a:endParaRPr lang="ru-RU" noProof="0" dirty="0"/>
           </a:p>
         </p:txBody>
       </p:sp>
